--- a/week_12/mla_formatting_and_research_week12.pptx
+++ b/week_12/mla_formatting_and_research_week12.pptx
@@ -21,6 +21,9 @@
     <p:sldId id="269" r:id="rId20"/>
     <p:sldId id="270" r:id="rId21"/>
     <p:sldId id="271" r:id="rId22"/>
+    <p:sldId id="274" r:id="rId26"/>
+    <p:sldId id="275" r:id="rId27"/>
+    <p:sldId id="276" r:id="rId28"/>
     <p:sldId id="272" r:id="rId23"/>
     <p:sldId id="273" r:id="rId24"/>
   </p:sldIdLst>
@@ -5605,6 +5608,238 @@
 </p:sld>
 </file>
 
+<file path=ppt/slides/slide19.xml><?xml version="1.0" encoding="utf-8"?>
+<p:sld xmlns:a="http://schemas.openxmlformats.org/drawingml/2006/main" xmlns:p="http://schemas.openxmlformats.org/presentationml/2006/main" xmlns:r="http://schemas.openxmlformats.org/officeDocument/2006/relationships">
+  <p:cSld>
+    <p:spTree>
+      <p:nvGrpSpPr>
+        <p:cNvPr id="1" name=""/>
+        <p:cNvGrpSpPr/>
+        <p:nvPr/>
+      </p:nvGrpSpPr>
+      <p:grpSpPr/>
+      <p:sp>
+        <p:nvSpPr>
+          <p:cNvPr id="2" name="Title 1"/>
+          <p:cNvSpPr>
+            <a:spLocks noGrp="1"/>
+          </p:cNvSpPr>
+          <p:nvPr>
+            <p:ph type="title"/>
+          </p:nvPr>
+        </p:nvSpPr>
+        <p:spPr/>
+        <p:txBody>
+          <a:bodyPr/>
+          <a:lstStyle/>
+          <a:p>
+            <a:r>
+              <a:t>Research Paper Choice: Social Networking or AI?</a:t>
+            </a:r>
+          </a:p>
+        </p:txBody>
+      </p:sp>
+      <p:sp>
+        <p:nvSpPr>
+          <p:cNvPr id="3" name="Text Placeholder 2"/>
+          <p:cNvSpPr>
+            <a:spLocks noGrp="1"/>
+          </p:cNvSpPr>
+          <p:nvPr>
+            <p:ph type="body" idx="1"/>
+          </p:nvPr>
+        </p:nvSpPr>
+        <p:spPr/>
+        <p:txBody>
+          <a:bodyPr/>
+          <a:lstStyle/>
+          <a:p>
+            <a:pPr>
+              <a:defRPr b="1" sz="2400"/>
+            </a:pPr>
+            <a:r>
+              <a:t>Social Networking Focus</a:t>
+            </a:r>
+          </a:p>
+          <a:p>
+            <a:pPr lvl="1">
+              <a:defRPr sz="1800"/>
+            </a:pPr>
+            <a:r>
+              <a:t>When do platforms help communities organize, learn, or launch careers?</a:t>
+            </a:r>
+          </a:p>
+          <a:p>
+            <a:pPr lvl="1">
+              <a:defRPr sz="1800"/>
+            </a:pPr>
+            <a:r>
+              <a:t>Which harms—privacy loss, data commodification, persuasion—demand attention?</a:t>
+            </a:r>
+          </a:p>
+        </p:txBody>
+      </p:sp>
+      <p:sp>
+        <p:nvSpPr>
+          <p:cNvPr id="4" name="Content Placeholder 3"/>
+          <p:cNvSpPr>
+            <a:spLocks noGrp="1"/>
+          </p:cNvSpPr>
+          <p:nvPr>
+            <p:ph idx="2" sz="half"/>
+          </p:nvPr>
+        </p:nvSpPr>
+        <p:spPr/>
+        <p:txBody>
+          <a:bodyPr/>
+          <a:lstStyle/>
+          <a:p>
+            <a:pPr>
+              <a:defRPr b="1" sz="2400"/>
+            </a:pPr>
+            <a:r>
+              <a:t>Artificial Intelligence Focus</a:t>
+            </a:r>
+          </a:p>
+          <a:p>
+            <a:pPr lvl="1">
+              <a:defRPr sz="1800"/>
+            </a:pPr>
+            <a:r>
+              <a:t>Where is AI amplifying human expertise (medicine, accessibility, climate)?</a:t>
+            </a:r>
+          </a:p>
+          <a:p>
+            <a:pPr lvl="1">
+              <a:defRPr sz="1800"/>
+            </a:pPr>
+            <a:r>
+              <a:t>Which risks—bias, opacity, accountability—should your paper interrogate?</a:t>
+            </a:r>
+          </a:p>
+        </p:txBody>
+      </p:sp>
+      <p:sp>
+        <p:nvSpPr>
+          <p:cNvPr id="5" name="Text Placeholder 4"/>
+          <p:cNvSpPr>
+            <a:spLocks noGrp="1"/>
+          </p:cNvSpPr>
+          <p:nvPr>
+            <p:ph type="body" idx="3" sz="quarter"/>
+          </p:nvPr>
+        </p:nvSpPr>
+        <p:spPr/>
+        <p:txBody>
+          <a:bodyPr/>
+          <a:lstStyle/>
+          <a:p/>
+        </p:txBody>
+      </p:sp>
+      <p:sp>
+        <p:nvSpPr>
+          <p:cNvPr id="6" name="Content Placeholder 5"/>
+          <p:cNvSpPr>
+            <a:spLocks noGrp="1"/>
+          </p:cNvSpPr>
+          <p:nvPr>
+            <p:ph idx="4" sz="quarter"/>
+          </p:nvPr>
+        </p:nvSpPr>
+        <p:spPr/>
+        <p:txBody>
+          <a:bodyPr/>
+          <a:lstStyle/>
+          <a:p/>
+        </p:txBody>
+      </p:sp>
+      <p:pic>
+        <p:nvPicPr>
+          <p:cNvPr id="7" name="Picture 6" descr="social_networking.png"/>
+          <p:cNvPicPr>
+            <a:picLocks noChangeAspect="1"/>
+          </p:cNvPicPr>
+          <p:nvPr/>
+        </p:nvPicPr>
+        <p:blipFill>
+          <a:blip r:embed="rId2"/>
+          <a:stretch>
+            <a:fillRect/>
+          </a:stretch>
+        </p:blipFill>
+        <p:spPr>
+          <a:xfrm>
+            <a:off x="548640" y="3108960"/>
+            <a:ext cx="3291840" cy="2194560"/>
+          </a:xfrm>
+          <a:prstGeom prst="rect">
+            <a:avLst/>
+          </a:prstGeom>
+        </p:spPr>
+      </p:pic>
+      <p:pic>
+        <p:nvPicPr>
+          <p:cNvPr id="8" name="Picture 7" descr="ai_brain.png"/>
+          <p:cNvPicPr>
+            <a:picLocks noChangeAspect="1"/>
+          </p:cNvPicPr>
+          <p:nvPr/>
+        </p:nvPicPr>
+        <p:blipFill>
+          <a:blip r:embed="rId3"/>
+          <a:stretch>
+            <a:fillRect/>
+          </a:stretch>
+        </p:blipFill>
+        <p:spPr>
+          <a:xfrm>
+            <a:off x="5852160" y="3108960"/>
+            <a:ext cx="3291840" cy="2194560"/>
+          </a:xfrm>
+          <a:prstGeom prst="rect">
+            <a:avLst/>
+          </a:prstGeom>
+        </p:spPr>
+      </p:pic>
+      <p:sp>
+        <p:nvSpPr>
+          <p:cNvPr id="9" name="TextBox 8"/>
+          <p:cNvSpPr txBox="1"/>
+          <p:nvPr/>
+        </p:nvSpPr>
+        <p:spPr>
+          <a:xfrm>
+            <a:off x="548640" y="5577840"/>
+            <a:ext cx="7772400" cy="457200"/>
+          </a:xfrm>
+          <a:prstGeom prst="rect">
+            <a:avLst/>
+          </a:prstGeom>
+          <a:noFill/>
+        </p:spPr>
+        <p:txBody>
+          <a:bodyPr wrap="none">
+            <a:spAutoFit/>
+          </a:bodyPr>
+          <a:lstStyle/>
+          <a:p>
+            <a:pPr>
+              <a:defRPr sz="1000"/>
+            </a:pPr>
+            <a:r>
+              <a:t>Illustrations created for CST1100 discussion prompts.</a:t>
+            </a:r>
+          </a:p>
+        </p:txBody>
+      </p:sp>
+    </p:spTree>
+  </p:cSld>
+  <p:clrMapOvr>
+    <a:masterClrMapping/>
+  </p:clrMapOvr>
+</p:sld>
+</file>
+
 <file path=ppt/slides/slide2.xml><?xml version="1.0" encoding="utf-8"?>
 <p:sld xmlns:a="http://schemas.openxmlformats.org/drawingml/2006/main" xmlns:p="http://schemas.openxmlformats.org/presentationml/2006/main" xmlns:r="http://schemas.openxmlformats.org/officeDocument/2006/relationships">
   <p:cSld>
@@ -5688,6 +5923,410 @@
             <a:r>
               <a:rPr sz="2800"/>
               <a:t>Choosing a focused topic and gathering credible sources</a:t>
+            </a:r>
+          </a:p>
+        </p:txBody>
+      </p:sp>
+    </p:spTree>
+  </p:cSld>
+  <p:clrMapOvr>
+    <a:masterClrMapping/>
+  </p:clrMapOvr>
+</p:sld>
+</file>
+
+<file path=ppt/slides/slide20.xml><?xml version="1.0" encoding="utf-8"?>
+<p:sld xmlns:a="http://schemas.openxmlformats.org/drawingml/2006/main" xmlns:p="http://schemas.openxmlformats.org/presentationml/2006/main" xmlns:r="http://schemas.openxmlformats.org/officeDocument/2006/relationships">
+  <p:cSld>
+    <p:spTree>
+      <p:nvGrpSpPr>
+        <p:cNvPr id="1" name=""/>
+        <p:cNvGrpSpPr/>
+        <p:nvPr/>
+      </p:nvGrpSpPr>
+      <p:grpSpPr/>
+      <p:sp>
+        <p:nvSpPr>
+          <p:cNvPr id="2" name="Title 1"/>
+          <p:cNvSpPr>
+            <a:spLocks noGrp="1"/>
+          </p:cNvSpPr>
+          <p:nvPr>
+            <p:ph type="title"/>
+          </p:nvPr>
+        </p:nvSpPr>
+        <p:spPr/>
+        <p:txBody>
+          <a:bodyPr/>
+          <a:lstStyle/>
+          <a:p>
+            <a:r>
+              <a:t>Social Networking Case Studies</a:t>
+            </a:r>
+          </a:p>
+        </p:txBody>
+      </p:sp>
+      <p:sp>
+        <p:nvSpPr>
+          <p:cNvPr id="3" name="Content Placeholder 2"/>
+          <p:cNvSpPr>
+            <a:spLocks noGrp="1"/>
+          </p:cNvSpPr>
+          <p:nvPr>
+            <p:ph idx="1" sz="half"/>
+          </p:nvPr>
+        </p:nvSpPr>
+        <p:spPr/>
+        <p:txBody>
+          <a:bodyPr/>
+          <a:lstStyle/>
+          <a:p>
+            <a:pPr>
+              <a:defRPr b="1" sz="2000"/>
+            </a:pPr>
+            <a:r>
+              <a:t>Good Example — Mutual Aid &amp; Career Building</a:t>
+            </a:r>
+          </a:p>
+          <a:p>
+            <a:pPr lvl="1">
+              <a:defRPr sz="1600"/>
+            </a:pPr>
+            <a:r>
+              <a:t>Students spin up Instagram/TikTok Live mutual-aid hubs to route groceries, charging stations, and translation help after storms.</a:t>
+            </a:r>
+          </a:p>
+          <a:p>
+            <a:pPr lvl="1">
+              <a:defRPr sz="1600"/>
+            </a:pPr>
+            <a:r>
+              <a:t>LinkedIn Student Voices playlists connect alumni mentors with first-gen interns and track job leads in real time.</a:t>
+            </a:r>
+          </a:p>
+          <a:p>
+            <a:pPr lvl="1">
+              <a:defRPr sz="1600"/>
+            </a:pPr>
+            <a:r>
+              <a:t>Research angles: What community design or data tells this success story? How do you document impact?</a:t>
+            </a:r>
+          </a:p>
+        </p:txBody>
+      </p:sp>
+      <p:sp>
+        <p:nvSpPr>
+          <p:cNvPr id="4" name="Content Placeholder 3"/>
+          <p:cNvSpPr>
+            <a:spLocks noGrp="1"/>
+          </p:cNvSpPr>
+          <p:nvPr>
+            <p:ph idx="2" sz="half"/>
+          </p:nvPr>
+        </p:nvSpPr>
+        <p:spPr/>
+        <p:txBody>
+          <a:bodyPr/>
+          <a:lstStyle/>
+          <a:p>
+            <a:pPr>
+              <a:defRPr b="1" sz="2000"/>
+            </a:pPr>
+            <a:r>
+              <a:t>Bad Example — Cambridge Analytica</a:t>
+            </a:r>
+          </a:p>
+          <a:p>
+            <a:pPr lvl="1">
+              <a:defRPr sz="1600"/>
+            </a:pPr>
+            <a:r>
+              <a:t>Harvested 87M Facebook profiles via quiz apps, merged them with voter files, and micro-targeted dark ads in U.S./U.K. elections.</a:t>
+            </a:r>
+          </a:p>
+          <a:p>
+            <a:pPr lvl="1">
+              <a:defRPr sz="1600"/>
+            </a:pPr>
+            <a:r>
+              <a:t>Illustrates how opaque data brokerage, lax API rules, and persuasive tech can distort civic participation.</a:t>
+            </a:r>
+          </a:p>
+          <a:p>
+            <a:pPr lvl="1">
+              <a:defRPr sz="1600"/>
+            </a:pPr>
+            <a:r>
+              <a:t>Discussion prompts: Consent, platform accountability, researcher ethics, policy fixes.</a:t>
+            </a:r>
+          </a:p>
+        </p:txBody>
+      </p:sp>
+      <p:pic>
+        <p:nvPicPr>
+          <p:cNvPr id="5" name="Picture 4" descr="cambridge_flow.png"/>
+          <p:cNvPicPr>
+            <a:picLocks noChangeAspect="1"/>
+          </p:cNvPicPr>
+          <p:nvPr/>
+        </p:nvPicPr>
+        <p:blipFill>
+          <a:blip r:embed="rId2"/>
+          <a:stretch>
+            <a:fillRect/>
+          </a:stretch>
+        </p:blipFill>
+        <p:spPr>
+          <a:xfrm>
+            <a:off x="5669280" y="3566160"/>
+            <a:ext cx="3657600" cy="1828800"/>
+          </a:xfrm>
+          <a:prstGeom prst="rect">
+            <a:avLst/>
+          </a:prstGeom>
+        </p:spPr>
+      </p:pic>
+      <p:sp>
+        <p:nvSpPr>
+          <p:cNvPr id="6" name="TextBox 5"/>
+          <p:cNvSpPr txBox="1"/>
+          <p:nvPr/>
+        </p:nvSpPr>
+        <p:spPr>
+          <a:xfrm>
+            <a:off x="5669280" y="5303520"/>
+            <a:ext cx="3200400" cy="457200"/>
+          </a:xfrm>
+          <a:prstGeom prst="rect">
+            <a:avLst/>
+          </a:prstGeom>
+          <a:noFill/>
+        </p:spPr>
+        <p:txBody>
+          <a:bodyPr wrap="none">
+            <a:spAutoFit/>
+          </a:bodyPr>
+          <a:lstStyle/>
+          <a:p>
+            <a:pPr>
+              <a:defRPr sz="1000"/>
+            </a:pPr>
+            <a:r>
+              <a:t>Flow created from public testimony &amp; ICO investigations.</a:t>
+            </a:r>
+          </a:p>
+        </p:txBody>
+      </p:sp>
+    </p:spTree>
+  </p:cSld>
+  <p:clrMapOvr>
+    <a:masterClrMapping/>
+  </p:clrMapOvr>
+</p:sld>
+</file>
+
+<file path=ppt/slides/slide21.xml><?xml version="1.0" encoding="utf-8"?>
+<p:sld xmlns:a="http://schemas.openxmlformats.org/drawingml/2006/main" xmlns:p="http://schemas.openxmlformats.org/presentationml/2006/main" xmlns:r="http://schemas.openxmlformats.org/officeDocument/2006/relationships">
+  <p:cSld>
+    <p:spTree>
+      <p:nvGrpSpPr>
+        <p:cNvPr id="1" name=""/>
+        <p:cNvGrpSpPr/>
+        <p:nvPr/>
+      </p:nvGrpSpPr>
+      <p:grpSpPr/>
+      <p:sp>
+        <p:nvSpPr>
+          <p:cNvPr id="2" name="Title 1"/>
+          <p:cNvSpPr>
+            <a:spLocks noGrp="1"/>
+          </p:cNvSpPr>
+          <p:nvPr>
+            <p:ph type="title"/>
+          </p:nvPr>
+        </p:nvSpPr>
+        <p:spPr/>
+        <p:txBody>
+          <a:bodyPr/>
+          <a:lstStyle/>
+          <a:p>
+            <a:r>
+              <a:t>Artificial Intelligence Case Studies</a:t>
+            </a:r>
+          </a:p>
+        </p:txBody>
+      </p:sp>
+      <p:sp>
+        <p:nvSpPr>
+          <p:cNvPr id="3" name="Content Placeholder 2"/>
+          <p:cNvSpPr>
+            <a:spLocks noGrp="1"/>
+          </p:cNvSpPr>
+          <p:nvPr>
+            <p:ph idx="1" sz="half"/>
+          </p:nvPr>
+        </p:nvSpPr>
+        <p:spPr/>
+        <p:txBody>
+          <a:bodyPr/>
+          <a:lstStyle/>
+          <a:p>
+            <a:pPr>
+              <a:defRPr b="1" sz="2000"/>
+            </a:pPr>
+            <a:r>
+              <a:t>Good Example — ML-Guided Cancer Surgery</a:t>
+            </a:r>
+          </a:p>
+          <a:p>
+            <a:pPr lvl="1">
+              <a:defRPr sz="1600"/>
+            </a:pPr>
+            <a:r>
+              <a:t>Nature Medicine (2019): convolutional neural nets detected brain tumor margins with 94.5% accuracy vs. 87% for surgeons alone.</a:t>
+            </a:r>
+          </a:p>
+          <a:p>
+            <a:pPr lvl="1">
+              <a:defRPr sz="1600"/>
+            </a:pPr>
+            <a:r>
+              <a:t>Hospitals pair surgeons with ML dashboards for in-operation calls, reducing repeat surgeries and costs.</a:t>
+            </a:r>
+          </a:p>
+          <a:p>
+            <a:pPr lvl="1">
+              <a:defRPr sz="1600"/>
+            </a:pPr>
+            <a:r>
+              <a:t>Consider data governance, IRB approvals, and interdisciplinary teams in your outline.</a:t>
+            </a:r>
+          </a:p>
+        </p:txBody>
+      </p:sp>
+      <p:sp>
+        <p:nvSpPr>
+          <p:cNvPr id="4" name="Content Placeholder 3"/>
+          <p:cNvSpPr>
+            <a:spLocks noGrp="1"/>
+          </p:cNvSpPr>
+          <p:nvPr>
+            <p:ph idx="2" sz="half"/>
+          </p:nvPr>
+        </p:nvSpPr>
+        <p:spPr/>
+        <p:txBody>
+          <a:bodyPr/>
+          <a:lstStyle/>
+          <a:p>
+            <a:pPr>
+              <a:defRPr b="1" sz="2000"/>
+            </a:pPr>
+            <a:r>
+              <a:t>Bad Example — Racist Sentencing &amp; Policing</a:t>
+            </a:r>
+          </a:p>
+          <a:p>
+            <a:pPr lvl="1">
+              <a:defRPr sz="1600"/>
+            </a:pPr>
+            <a:r>
+              <a:t>COMPAS risk scores flagged Black defendants “high risk” at twice the false-positive rate of white defendants (ProPublica, 2016).</a:t>
+            </a:r>
+          </a:p>
+          <a:p>
+            <a:pPr lvl="1">
+              <a:defRPr sz="1600"/>
+            </a:pPr>
+            <a:r>
+              <a:t>Predictive policing tools (PredPol, LASER) flood patrols into already over-surveilled neighborhoods, reinforcing bias loops.</a:t>
+            </a:r>
+          </a:p>
+          <a:p>
+            <a:pPr lvl="1">
+              <a:defRPr sz="1600"/>
+            </a:pPr>
+            <a:r>
+              <a:t>Discuss algorithmic transparency, audit rights, and abolitionist tech frameworks.</a:t>
+            </a:r>
+          </a:p>
+        </p:txBody>
+      </p:sp>
+      <p:pic>
+        <p:nvPicPr>
+          <p:cNvPr id="5" name="Picture 4" descr="ai_cancer_chart.png"/>
+          <p:cNvPicPr>
+            <a:picLocks noChangeAspect="1"/>
+          </p:cNvPicPr>
+          <p:nvPr/>
+        </p:nvPicPr>
+        <p:blipFill>
+          <a:blip r:embed="rId2"/>
+          <a:stretch>
+            <a:fillRect/>
+          </a:stretch>
+        </p:blipFill>
+        <p:spPr>
+          <a:xfrm>
+            <a:off x="548640" y="3749039"/>
+            <a:ext cx="3657600" cy="2743200"/>
+          </a:xfrm>
+          <a:prstGeom prst="rect">
+            <a:avLst/>
+          </a:prstGeom>
+        </p:spPr>
+      </p:pic>
+      <p:pic>
+        <p:nvPicPr>
+          <p:cNvPr id="6" name="Picture 5" descr="ai_bias_chart.png"/>
+          <p:cNvPicPr>
+            <a:picLocks noChangeAspect="1"/>
+          </p:cNvPicPr>
+          <p:nvPr/>
+        </p:nvPicPr>
+        <p:blipFill>
+          <a:blip r:embed="rId3"/>
+          <a:stretch>
+            <a:fillRect/>
+          </a:stretch>
+        </p:blipFill>
+        <p:spPr>
+          <a:xfrm>
+            <a:off x="5394960" y="3749039"/>
+            <a:ext cx="3657600" cy="2743200"/>
+          </a:xfrm>
+          <a:prstGeom prst="rect">
+            <a:avLst/>
+          </a:prstGeom>
+        </p:spPr>
+      </p:pic>
+      <p:sp>
+        <p:nvSpPr>
+          <p:cNvPr id="7" name="TextBox 6"/>
+          <p:cNvSpPr txBox="1"/>
+          <p:nvPr/>
+        </p:nvSpPr>
+        <p:spPr>
+          <a:xfrm>
+            <a:off x="548640" y="5486400"/>
+            <a:ext cx="8229600" cy="457200"/>
+          </a:xfrm>
+          <a:prstGeom prst="rect">
+            <a:avLst/>
+          </a:prstGeom>
+          <a:noFill/>
+        </p:spPr>
+        <p:txBody>
+          <a:bodyPr wrap="none">
+            <a:spAutoFit/>
+          </a:bodyPr>
+          <a:lstStyle/>
+          <a:p>
+            <a:pPr>
+              <a:defRPr sz="1000"/>
+            </a:pPr>
+            <a:r>
+              <a:t>Charts created from Nature Medicine (2019) and ProPublica (2016) reporting.</a:t>
             </a:r>
           </a:p>
         </p:txBody>
